--- a/web/downloads/shared/w4/W4.pptx
+++ b/web/downloads/shared/w4/W4.pptx
@@ -3218,7 +3218,7 @@
                 </a:solidFill>
                 <a:latin typeface="Pretendard Black"/>
               </a:rPr>
-              <a:t>다른 아키텍처</a:t>
+              <a:t>딥러닝 아키텍처 비교</a:t>
             </a:r>
           </a:p>
         </p:txBody>
@@ -3257,7 +3257,7 @@
                 </a:solidFill>
                 <a:latin typeface="Pretendard SemiBold"/>
               </a:rPr>
-              <a:t>Transformer · 3D CNN. 같은 문제 · 같은 정보 · 같은 시간 예산에서 구조를 비교한다</a:t>
+              <a:t>대안 구조(Transformer · 3D CNN · diffusion)를 우리 pix2pix 접근과 같은 조건에서 비교한다</a:t>
             </a:r>
           </a:p>
         </p:txBody>
@@ -4400,7 +4400,7 @@
                 </a:solidFill>
                 <a:latin typeface="Pretendard SemiBold"/>
               </a:rPr>
-              <a:t>③ 같은 시간 예산: wall-clock 고정, 빠른 구조는 epoch 을 더 돈다</a:t>
+              <a:t>③ 같은 예산: 미니는 파라미터 고정(구조 분리), 대규모는 시간 고정(실전)</a:t>
             </a:r>
           </a:p>
         </p:txBody>
@@ -4639,7 +4639,7 @@
         <p:spPr>
           <a:xfrm>
             <a:off x="1005840" y="1371600"/>
-            <a:ext cx="10149840" cy="4398264"/>
+            <a:ext cx="10149840" cy="4511040"/>
           </a:xfrm>
           <a:prstGeom prst="rect">
             <a:avLst/>
@@ -4680,7 +4680,7 @@
                 </a:solidFill>
                 <a:latin typeface="Pretendard SemiBold"/>
               </a:rPr>
-              <a:t>2D UNet 0.932/0.27%p · SwinUNet(1/22 크기) 0.926/0.34 · 3D 0.914/0.40. 최고는 2D UNet+3축 융합 0.935/0.12 (W5 예고).</a:t>
+              <a:t>별=우리 모델(MAPS) 0.935/0.122%p 최우수 · 2D UNet 0.932/0.265 · SwinUNet(1/22) 0.926/0.343 · 3D 0.914/0.402 · diffusion off-Pareto.</a:t>
             </a:r>
           </a:p>
         </p:txBody>
@@ -5121,7 +5121,7 @@
         <p:spPr>
           <a:xfrm>
             <a:off x="1463040" y="1280160"/>
-            <a:ext cx="9326880" cy="4313763"/>
+            <a:ext cx="9326880" cy="3593270"/>
           </a:xfrm>
           <a:prstGeom prst="rect">
             <a:avLst/>
@@ -5162,7 +5162,7 @@
                 </a:solidFill>
                 <a:latin typeface="Pretendard SemiBold"/>
               </a:rPr>
-              <a:t>Bentheimer k=2 · CPU 90초/모델: 선형 11.75%p → UNet2D 1.94 · UNet3D 1.99 · Swin 2.37%p. 대규모와 같은 경향.</a:t>
+              <a:t>Bentheimer k=2 · CPU 90초/모델: 우리 방식(GAN) |Δφ| 0.37%p 최저 · 2D UNet SSIM 0.587 최고. GAN 은 물성 보존에서 앞선다.</a:t>
             </a:r>
           </a:p>
         </p:txBody>
@@ -5888,7 +5888,7 @@
                 </a:solidFill>
                 <a:latin typeface="Pretendard Black"/>
               </a:rPr>
-              <a:t>W1 → W3 성과</a:t>
+              <a:t>우리 방법 (개선 축)</a:t>
             </a:r>
           </a:p>
         </p:txBody>
@@ -5939,7 +5939,7 @@
                 </a:solidFill>
                 <a:latin typeface="Pretendard SemiBold"/>
               </a:rPr>
-              <a:t>선형 보간 → UNet+L1 → +GAN</a:t>
+              <a:t>pix2pix · 손실 · 다채널 입력</a:t>
             </a:r>
           </a:p>
           <a:p>
@@ -5967,7 +5967,7 @@
                 </a:solidFill>
                 <a:latin typeface="Pretendard SemiBold"/>
               </a:rPr>
-              <a:t>개선은 전부 손실·학습 방법</a:t>
+              <a:t>GAN (W3) · 다축 융합 (W5)</a:t>
             </a:r>
           </a:p>
           <a:p>
@@ -5995,7 +5995,7 @@
                 </a:solidFill>
                 <a:latin typeface="Pretendard SemiBold"/>
               </a:rPr>
-              <a:t>구조는 2D UNet 하나뿐이었다</a:t>
+              <a:t>구조 뼈대는 2D 합성곱 유지</a:t>
             </a:r>
           </a:p>
         </p:txBody>
@@ -6034,7 +6034,7 @@
                 </a:solidFill>
                 <a:latin typeface="Pretendard Black"/>
               </a:rPr>
-              <a:t>이번 주 질문</a:t>
+              <a:t>비교군 (검증 축, 이번 주)</a:t>
             </a:r>
           </a:p>
         </p:txBody>
@@ -6085,7 +6085,7 @@
                 </a:solidFill>
                 <a:latin typeface="Pretendard SemiBold"/>
               </a:rPr>
-              <a:t>연결 방식이 다른 구조는?</a:t>
+              <a:t>Transformer (Swin)</a:t>
             </a:r>
           </a:p>
           <a:p>
@@ -6113,7 +6113,7 @@
                 </a:solidFill>
                 <a:latin typeface="Pretendard SemiBold"/>
               </a:rPr>
-              <a:t>창 attention (Swin)</a:t>
+              <a:t>3D CNN · diffusion</a:t>
             </a:r>
           </a:p>
           <a:p>
@@ -6141,7 +6141,7 @@
                 </a:solidFill>
                 <a:latin typeface="Pretendard SemiBold"/>
               </a:rPr>
-              <a:t>3D 합성곱 (부피 문맥)</a:t>
+              <a:t>채택 대상 아닌 비교 기준(baseline)</a:t>
             </a:r>
           </a:p>
         </p:txBody>
@@ -6180,7 +6180,7 @@
                 </a:solidFill>
                 <a:latin typeface="Pretendard SemiBold"/>
               </a:rPr>
-              <a:t>세 구조를 파라미터 약 12만으로 맞춰 비교한다. 차이가 나면 크기가 아니라 구조의 차이다.</a:t>
+              <a:t>비교군은 우리 접근이 좋은지 판단할 기준이다. 대규모 결과에서 우리 모델(MAPS)이 이들을 앞선다.</a:t>
             </a:r>
           </a:p>
         </p:txBody>
